--- a/slides/job-hunt-workshop/Job-Hunt-Workshop.pptx
+++ b/slides/job-hunt-workshop/Job-Hunt-Workshop.pptx
@@ -23136,7 +23136,7 @@
         </p:blipFill>
         <p:spPr>
           <a:xfrm>
-            <a:off x="152400" y="1983822"/>
+            <a:off x="5029200" y="2937519"/>
             <a:ext cx="6318575" cy="3041806"/>
           </a:xfrm>
           <a:prstGeom prst="rect">
@@ -23158,8 +23158,8 @@
         </p:nvSpPr>
         <p:spPr>
           <a:xfrm>
-            <a:off x="5638800" y="5181600"/>
-            <a:ext cx="6859022" cy="584775"/>
+            <a:off x="228600" y="2286000"/>
+            <a:ext cx="7849622" cy="523220"/>
           </a:xfrm>
           <a:prstGeom prst="rect">
             <a:avLst/>
@@ -23173,7 +23173,15 @@
           <a:lstStyle/>
           <a:p>
             <a:r>
-              <a:rPr lang="en-US" dirty="0">
+              <a:rPr lang="en-US" sz="2800" b="1" dirty="0">
+                <a:latin typeface="Calibri" panose="020F0502020204030204" pitchFamily="34" charset="0"/>
+                <a:ea typeface="Calibri" panose="020F0502020204030204" pitchFamily="34" charset="0"/>
+                <a:cs typeface="Calibri" panose="020F0502020204030204" pitchFamily="34" charset="0"/>
+              </a:rPr>
+              <a:t>Full Site: </a:t>
+            </a:r>
+            <a:r>
+              <a:rPr lang="en-US" sz="2800" dirty="0">
                 <a:latin typeface="Calibri" panose="020F0502020204030204" pitchFamily="34" charset="0"/>
                 <a:ea typeface="Calibri" panose="020F0502020204030204" pitchFamily="34" charset="0"/>
                 <a:cs typeface="Calibri" panose="020F0502020204030204" pitchFamily="34" charset="0"/>
@@ -23205,7 +23213,7 @@
         </p:blipFill>
         <p:spPr>
           <a:xfrm>
-            <a:off x="7696200" y="1964388"/>
+            <a:off x="1447800" y="2895600"/>
             <a:ext cx="3061240" cy="3061240"/>
           </a:xfrm>
           <a:prstGeom prst="rect">
@@ -23247,7 +23255,103 @@
                 <a:ea typeface="Calibri" panose="020F0502020204030204" pitchFamily="34" charset="0"/>
                 <a:cs typeface="Calibri" panose="020F0502020204030204" pitchFamily="34" charset="0"/>
               </a:rPr>
-              <a:t>Full Career Development Wiki</a:t>
+              <a:t>Career Development Wiki</a:t>
+            </a:r>
+          </a:p>
+        </p:txBody>
+      </p:sp>
+      <p:sp>
+        <p:nvSpPr>
+          <p:cNvPr id="17" name="TextBox 16">
+            <a:extLst>
+              <a:ext uri="{FF2B5EF4-FFF2-40B4-BE49-F238E27FC236}">
+                <a16:creationId xmlns:a16="http://schemas.microsoft.com/office/drawing/2014/main" id="{520B8B9E-670A-D65D-A329-6AC9D254BBD4}"/>
+              </a:ext>
+            </a:extLst>
+          </p:cNvPr>
+          <p:cNvSpPr txBox="1"/>
+          <p:nvPr/>
+        </p:nvSpPr>
+        <p:spPr>
+          <a:xfrm>
+            <a:off x="201118" y="1062480"/>
+            <a:ext cx="12268200" cy="954107"/>
+          </a:xfrm>
+          <a:prstGeom prst="rect">
+            <a:avLst/>
+          </a:prstGeom>
+          <a:noFill/>
+        </p:spPr>
+        <p:txBody>
+          <a:bodyPr wrap="square">
+            <a:spAutoFit/>
+          </a:bodyPr>
+          <a:lstStyle/>
+          <a:p>
+            <a:r>
+              <a:rPr lang="en-US" sz="2800" b="1" dirty="0">
+                <a:latin typeface="Calibri" panose="020F0502020204030204" pitchFamily="34" charset="0"/>
+                <a:ea typeface="Calibri" panose="020F0502020204030204" pitchFamily="34" charset="0"/>
+                <a:cs typeface="Calibri" panose="020F0502020204030204" pitchFamily="34" charset="0"/>
+              </a:rPr>
+              <a:t>Today’s Workshop</a:t>
+            </a:r>
+          </a:p>
+          <a:p>
+            <a:r>
+              <a:rPr lang="en-US" sz="2800" dirty="0">
+                <a:latin typeface="Calibri" panose="020F0502020204030204" pitchFamily="34" charset="0"/>
+                <a:ea typeface="Calibri" panose="020F0502020204030204" pitchFamily="34" charset="0"/>
+                <a:cs typeface="Calibri" panose="020F0502020204030204" pitchFamily="34" charset="0"/>
+              </a:rPr>
+              <a:t>https://github.com/second-hand-tigers/badocter-career-learnings/wiki/Job-Hunt</a:t>
+            </a:r>
+          </a:p>
+        </p:txBody>
+      </p:sp>
+      <p:sp>
+        <p:nvSpPr>
+          <p:cNvPr id="19" name="TextBox 18">
+            <a:extLst>
+              <a:ext uri="{FF2B5EF4-FFF2-40B4-BE49-F238E27FC236}">
+                <a16:creationId xmlns:a16="http://schemas.microsoft.com/office/drawing/2014/main" id="{59D3D59F-44C4-5EE0-B0B5-97C4CDEAB5A5}"/>
+              </a:ext>
+            </a:extLst>
+          </p:cNvPr>
+          <p:cNvSpPr txBox="1"/>
+          <p:nvPr/>
+        </p:nvSpPr>
+        <p:spPr>
+          <a:xfrm>
+            <a:off x="236440" y="6365751"/>
+            <a:ext cx="11116332" cy="523220"/>
+          </a:xfrm>
+          <a:prstGeom prst="rect">
+            <a:avLst/>
+          </a:prstGeom>
+          <a:noFill/>
+        </p:spPr>
+        <p:txBody>
+          <a:bodyPr wrap="square">
+            <a:spAutoFit/>
+          </a:bodyPr>
+          <a:lstStyle/>
+          <a:p>
+            <a:r>
+              <a:rPr lang="en-US" sz="2800" b="1" dirty="0">
+                <a:latin typeface="Calibri" panose="020F0502020204030204" pitchFamily="34" charset="0"/>
+                <a:ea typeface="Calibri" panose="020F0502020204030204" pitchFamily="34" charset="0"/>
+                <a:cs typeface="Calibri" panose="020F0502020204030204" pitchFamily="34" charset="0"/>
+              </a:rPr>
+              <a:t>LinkedIn</a:t>
+            </a:r>
+            <a:r>
+              <a:rPr lang="en-US" sz="2800" dirty="0">
+                <a:latin typeface="Calibri" panose="020F0502020204030204" pitchFamily="34" charset="0"/>
+                <a:ea typeface="Calibri" panose="020F0502020204030204" pitchFamily="34" charset="0"/>
+                <a:cs typeface="Calibri" panose="020F0502020204030204" pitchFamily="34" charset="0"/>
+              </a:rPr>
+              <a:t>: https://www.linkedin.com/company/second-hand-tigers/posts/</a:t>
             </a:r>
           </a:p>
         </p:txBody>
